--- a/dist/초3/과학/힘과소리/초3_과학_힘과소리_01_밀기·당기기와수평잡기_학생용.pptx
+++ b/dist/초3/과학/힘과소리/초3_과학_힘과소리_01_밀기·당기기와수평잡기_학생용.pptx
@@ -122,13 +122,13 @@
   <p:extLst>
     <p:ext uri="{521415D9-36F7-43E2-AB2F-B90AF26B5E84}">
       <p14:sectionLst xmlns:p14="http://schemas.microsoft.com/office/powerpoint/2010/main">
-        <p14:section name="도입" id="{31d69cd3-64fd-4646-ab3d-7c1e27e8d9c1}">
+        <p14:section name="도입" id="{52d9d7da-82bf-9323-2844-cf03ccf0c3c6}">
           <p14:sldIdLst>
             <p14:sldId id="256"/>
             <p14:sldId id="257"/>
           </p14:sldIdLst>
         </p14:section>
-        <p14:section name="개념" id="{e88b9338-173f-68ff-1df1-7322f6327a29}">
+        <p14:section name="개념" id="{1b84cf99-5f54-9ba7-055e-542dae448e16}">
           <p14:sldIdLst>
             <p14:sldId id="258"/>
             <p14:sldId id="259"/>
@@ -138,7 +138,7 @@
             <p14:sldId id="264"/>
           </p14:sldIdLst>
         </p14:section>
-        <p14:section name="연습" id="{3b5894a9-9629-4aa4-33c5-58a8635c72ce}">
+        <p14:section name="연습" id="{bfe57e48-9a95-a459-9acd-8fc9977ab781}">
           <p14:sldIdLst>
             <p14:sldId id="262"/>
             <p14:sldId id="265"/>
@@ -146,24 +146,24 @@
             <p14:sldId id="267"/>
           </p14:sldIdLst>
         </p14:section>
-        <p14:section name="개념" id="{9eb9c0bf-5e66-fad9-69dd-acfa7ac3717f}">
+        <p14:section name="개념" id="{7233bd84-d9df-dd77-82dc-68a4a30d32a5}">
           <p14:sldIdLst/>
         </p14:section>
-        <p14:section name="연습" id="{bee92184-cb40-55fd-f27c-fb1e82cdcb7a}">
+        <p14:section name="연습" id="{d3a4fa67-2a69-8b32-2e64-7ab970db0e78}">
           <p14:sldIdLst/>
         </p14:section>
-        <p14:section name="확인" id="{a45c3f0d-24a6-0427-425f-506e90b6f175}">
+        <p14:section name="확인" id="{eaaaf18b-f1c6-0de3-382c-dc849967d9f6}">
           <p14:sldIdLst>
             <p14:sldId id="268"/>
             <p14:sldId id="269"/>
           </p14:sldIdLst>
         </p14:section>
-        <p14:section name="정리" id="{fd60b4a4-be63-3215-42a3-5548f7e420ba}">
+        <p14:section name="정리" id="{2897e577-5093-8da9-d4b6-261cce9427b4}">
           <p14:sldIdLst>
             <p14:sldId id="270"/>
           </p14:sldIdLst>
         </p14:section>
-        <p14:section name="보충" id="{68cbe363-37e1-6c60-b1f5-403f287259c5}">
+        <p14:section name="보충" id="{693f93f2-02d5-a190-05fb-365c18e0472e}">
           <p14:sldIdLst>
             <p14:sldId id="271"/>
           </p14:sldIdLst>

--- a/dist/초3/과학/힘과소리/초3_과학_힘과소리_01_밀기·당기기와수평잡기_학생용.pptx
+++ b/dist/초3/과학/힘과소리/초3_과학_힘과소리_01_밀기·당기기와수평잡기_학생용.pptx
@@ -122,13 +122,13 @@
   <p:extLst>
     <p:ext uri="{521415D9-36F7-43E2-AB2F-B90AF26B5E84}">
       <p14:sectionLst xmlns:p14="http://schemas.microsoft.com/office/powerpoint/2010/main">
-        <p14:section name="도입" id="{52d9d7da-82bf-9323-2844-cf03ccf0c3c6}">
+        <p14:section name="도입" id="{ec0c1d2d-0a83-0bfb-b2f8-1eff118bee57}">
           <p14:sldIdLst>
             <p14:sldId id="256"/>
             <p14:sldId id="257"/>
           </p14:sldIdLst>
         </p14:section>
-        <p14:section name="개념" id="{1b84cf99-5f54-9ba7-055e-542dae448e16}">
+        <p14:section name="개념" id="{d243553f-88dd-e406-7f55-0fa8ff59d019}">
           <p14:sldIdLst>
             <p14:sldId id="258"/>
             <p14:sldId id="259"/>
@@ -138,7 +138,7 @@
             <p14:sldId id="264"/>
           </p14:sldIdLst>
         </p14:section>
-        <p14:section name="연습" id="{bfe57e48-9a95-a459-9acd-8fc9977ab781}">
+        <p14:section name="연습" id="{86288d2f-4823-1021-764f-51e137743d5e}">
           <p14:sldIdLst>
             <p14:sldId id="262"/>
             <p14:sldId id="265"/>
@@ -146,24 +146,24 @@
             <p14:sldId id="267"/>
           </p14:sldIdLst>
         </p14:section>
-        <p14:section name="개념" id="{7233bd84-d9df-dd77-82dc-68a4a30d32a5}">
+        <p14:section name="개념" id="{d7a610c0-bb3a-09a1-a6df-fd9368831fab}">
           <p14:sldIdLst/>
         </p14:section>
-        <p14:section name="연습" id="{d3a4fa67-2a69-8b32-2e64-7ab970db0e78}">
+        <p14:section name="연습" id="{8734b945-b34e-650b-2e93-992aeb93d8b9}">
           <p14:sldIdLst/>
         </p14:section>
-        <p14:section name="확인" id="{eaaaf18b-f1c6-0de3-382c-dc849967d9f6}">
+        <p14:section name="확인" id="{bc2fdd15-58c4-f541-6175-673a595ba9c3}">
           <p14:sldIdLst>
             <p14:sldId id="268"/>
             <p14:sldId id="269"/>
           </p14:sldIdLst>
         </p14:section>
-        <p14:section name="정리" id="{2897e577-5093-8da9-d4b6-261cce9427b4}">
+        <p14:section name="정리" id="{39b09003-f69f-6d75-450d-8fea00a7c0ac}">
           <p14:sldIdLst>
             <p14:sldId id="270"/>
           </p14:sldIdLst>
         </p14:section>
-        <p14:section name="보충" id="{693f93f2-02d5-a190-05fb-365c18e0472e}">
+        <p14:section name="보충" id="{02acfbdb-312b-af4a-3fe6-c965332d85c3}">
           <p14:sldIdLst>
             <p14:sldId id="271"/>
           </p14:sldIdLst>
